--- a/PPT_/1st/2DGP_TermProject.pptx
+++ b/PPT_/1st/2DGP_TermProject.pptx
@@ -12,6 +12,8 @@
     <p:sldId id="264" r:id="rId6"/>
     <p:sldId id="265" r:id="rId7"/>
     <p:sldId id="262" r:id="rId8"/>
+    <p:sldId id="267" r:id="rId9"/>
+    <p:sldId id="268" r:id="rId10"/>
   </p:sldIdLst>
   <p:sldSz cx="12192000" cy="6858000"/>
   <p:notesSz cx="6858000" cy="9144000"/>
@@ -4468,7 +4470,7 @@
         </p:spPr>
         <p:txBody>
           <a:bodyPr anchor="t">
-            <a:normAutofit/>
+            <a:normAutofit fontScale="92500" lnSpcReduction="20000"/>
           </a:bodyPr>
           <a:lstStyle/>
           <a:p>
@@ -4486,6 +4488,72 @@
               <a:rPr lang="ko-KR" altLang="en-US" sz="2000" dirty="0">
                 <a:latin typeface="Arial" panose="020B0604020202020204" pitchFamily="34" charset="0"/>
               </a:rPr>
+              <a:t>장르 </a:t>
+            </a:r>
+            <a:r>
+              <a:rPr lang="en-US" altLang="ko-KR" sz="2000" dirty="0">
+                <a:latin typeface="Arial" panose="020B0604020202020204" pitchFamily="34" charset="0"/>
+              </a:rPr>
+              <a:t>- </a:t>
+            </a:r>
+            <a:r>
+              <a:rPr lang="ko-KR" altLang="en-US" sz="2000" dirty="0" err="1">
+                <a:latin typeface="Arial" panose="020B0604020202020204" pitchFamily="34" charset="0"/>
+              </a:rPr>
+              <a:t>플랫포머</a:t>
+            </a:r>
+            <a:r>
+              <a:rPr lang="en-US" altLang="ko-KR" sz="2000" dirty="0">
+                <a:latin typeface="Arial" panose="020B0604020202020204" pitchFamily="34" charset="0"/>
+              </a:rPr>
+              <a:t>, </a:t>
+            </a:r>
+            <a:r>
+              <a:rPr lang="ko-KR" altLang="en-US" sz="2000" dirty="0">
+                <a:latin typeface="Arial" panose="020B0604020202020204" pitchFamily="34" charset="0"/>
+              </a:rPr>
+              <a:t>액션 </a:t>
+            </a:r>
+            <a:r>
+              <a:rPr lang="en-US" altLang="ko-KR" sz="2000" dirty="0" err="1">
+                <a:latin typeface="Arial" panose="020B0604020202020204" pitchFamily="34" charset="0"/>
+              </a:rPr>
+              <a:t>rpg</a:t>
+            </a:r>
+            <a:endParaRPr lang="en-US" altLang="ko-KR" sz="2000" dirty="0">
+              <a:latin typeface="Arial" panose="020B0604020202020204" pitchFamily="34" charset="0"/>
+            </a:endParaRPr>
+          </a:p>
+          <a:p>
+            <a:pPr defTabSz="914400" eaLnBrk="0" fontAlgn="base" hangingPunct="0">
+              <a:spcBef>
+                <a:spcPct val="0"/>
+              </a:spcBef>
+              <a:spcAft>
+                <a:spcPts val="600"/>
+              </a:spcAft>
+              <a:buFontTx/>
+              <a:buChar char="•"/>
+            </a:pPr>
+            <a:endParaRPr lang="en-US" altLang="ko-KR" sz="2000" dirty="0">
+              <a:latin typeface="Arial" panose="020B0604020202020204" pitchFamily="34" charset="0"/>
+            </a:endParaRPr>
+          </a:p>
+          <a:p>
+            <a:pPr defTabSz="914400" eaLnBrk="0" fontAlgn="base" hangingPunct="0">
+              <a:spcBef>
+                <a:spcPct val="0"/>
+              </a:spcBef>
+              <a:spcAft>
+                <a:spcPts val="600"/>
+              </a:spcAft>
+              <a:buFontTx/>
+              <a:buChar char="•"/>
+            </a:pPr>
+            <a:r>
+              <a:rPr lang="ko-KR" altLang="en-US" sz="2000" dirty="0">
+                <a:latin typeface="Arial" panose="020B0604020202020204" pitchFamily="34" charset="0"/>
+              </a:rPr>
               <a:t>스킬을 사용한 </a:t>
             </a:r>
             <a:r>
@@ -4503,6 +4571,70 @@
             <a:endParaRPr lang="en-US" altLang="ko-KR" sz="2000" dirty="0">
               <a:latin typeface="Arial" panose="020B0604020202020204" pitchFamily="34" charset="0"/>
             </a:endParaRPr>
+          </a:p>
+          <a:p>
+            <a:pPr marL="0" indent="0" defTabSz="914400" eaLnBrk="0" fontAlgn="base" hangingPunct="0">
+              <a:spcBef>
+                <a:spcPct val="0"/>
+              </a:spcBef>
+              <a:spcAft>
+                <a:spcPts val="600"/>
+              </a:spcAft>
+              <a:buNone/>
+            </a:pPr>
+            <a:endParaRPr lang="en-US" altLang="ko-KR" sz="2000" dirty="0">
+              <a:latin typeface="Arial" panose="020B0604020202020204" pitchFamily="34" charset="0"/>
+            </a:endParaRPr>
+          </a:p>
+          <a:p>
+            <a:pPr defTabSz="914400" eaLnBrk="0" fontAlgn="base" hangingPunct="0">
+              <a:spcBef>
+                <a:spcPct val="0"/>
+              </a:spcBef>
+              <a:spcAft>
+                <a:spcPts val="600"/>
+              </a:spcAft>
+              <a:buFontTx/>
+              <a:buChar char="•"/>
+            </a:pPr>
+            <a:r>
+              <a:rPr lang="ko-KR" altLang="en-US" sz="2000" dirty="0">
+                <a:latin typeface="Arial" panose="020B0604020202020204" pitchFamily="34" charset="0"/>
+              </a:rPr>
+              <a:t>스테이지 클리어 후 랜덤하게 얻는 추가 능력</a:t>
+            </a:r>
+            <a:endParaRPr lang="en-US" altLang="ko-KR" sz="2000" dirty="0">
+              <a:latin typeface="Arial" panose="020B0604020202020204" pitchFamily="34" charset="0"/>
+            </a:endParaRPr>
+          </a:p>
+          <a:p>
+            <a:pPr marL="0" indent="0" defTabSz="914400" eaLnBrk="0" fontAlgn="base" hangingPunct="0">
+              <a:spcBef>
+                <a:spcPct val="0"/>
+              </a:spcBef>
+              <a:spcAft>
+                <a:spcPts val="600"/>
+              </a:spcAft>
+              <a:buNone/>
+            </a:pPr>
+            <a:r>
+              <a:rPr lang="en-US" altLang="ko-KR" sz="2000" dirty="0">
+                <a:latin typeface="Arial" panose="020B0604020202020204" pitchFamily="34" charset="0"/>
+              </a:rPr>
+              <a:t>   (</a:t>
+            </a:r>
+            <a:r>
+              <a:rPr lang="ko-KR" altLang="en-US" sz="2000" dirty="0">
+                <a:latin typeface="Arial" panose="020B0604020202020204" pitchFamily="34" charset="0"/>
+              </a:rPr>
+              <a:t>새 게임 진행 시 초기화</a:t>
+            </a:r>
+            <a:r>
+              <a:rPr lang="en-US" altLang="ko-KR" sz="2000" dirty="0">
+                <a:latin typeface="Arial" panose="020B0604020202020204" pitchFamily="34" charset="0"/>
+              </a:rPr>
+              <a:t>)</a:t>
+            </a:r>
           </a:p>
           <a:p>
             <a:pPr eaLnBrk="0" fontAlgn="base" hangingPunct="0">
@@ -4520,7 +4652,7 @@
             </a:endParaRPr>
           </a:p>
           <a:p>
-            <a:pPr defTabSz="914400" eaLnBrk="0" fontAlgn="base" hangingPunct="0">
+            <a:pPr eaLnBrk="0" fontAlgn="base" hangingPunct="0">
               <a:spcBef>
                 <a:spcPct val="0"/>
               </a:spcBef>
@@ -4541,7 +4673,7 @@
             </a:endParaRPr>
           </a:p>
           <a:p>
-            <a:pPr marL="0" indent="0" defTabSz="914400" eaLnBrk="0" fontAlgn="base" hangingPunct="0">
+            <a:pPr marL="0" indent="0" eaLnBrk="0" fontAlgn="base" hangingPunct="0">
               <a:spcBef>
                 <a:spcPct val="0"/>
               </a:spcBef>
@@ -4565,70 +4697,6 @@
             <a:endParaRPr lang="en-US" altLang="ko-KR" sz="2000" dirty="0">
               <a:latin typeface="Arial" panose="020B0604020202020204" pitchFamily="34" charset="0"/>
             </a:endParaRPr>
-          </a:p>
-          <a:p>
-            <a:pPr marL="0" indent="0" defTabSz="914400" eaLnBrk="0" fontAlgn="base" hangingPunct="0">
-              <a:spcBef>
-                <a:spcPct val="0"/>
-              </a:spcBef>
-              <a:spcAft>
-                <a:spcPts val="600"/>
-              </a:spcAft>
-              <a:buNone/>
-            </a:pPr>
-            <a:endParaRPr lang="en-US" altLang="ko-KR" sz="2000" dirty="0">
-              <a:latin typeface="Arial" panose="020B0604020202020204" pitchFamily="34" charset="0"/>
-            </a:endParaRPr>
-          </a:p>
-          <a:p>
-            <a:pPr defTabSz="914400" eaLnBrk="0" fontAlgn="base" hangingPunct="0">
-              <a:spcBef>
-                <a:spcPct val="0"/>
-              </a:spcBef>
-              <a:spcAft>
-                <a:spcPts val="600"/>
-              </a:spcAft>
-              <a:buFontTx/>
-              <a:buChar char="•"/>
-            </a:pPr>
-            <a:r>
-              <a:rPr lang="ko-KR" altLang="en-US" sz="2000" dirty="0">
-                <a:latin typeface="Arial" panose="020B0604020202020204" pitchFamily="34" charset="0"/>
-              </a:rPr>
-              <a:t>스테이지 클리어 후 랜덤하게 얻는 추가 능력</a:t>
-            </a:r>
-            <a:endParaRPr lang="en-US" altLang="ko-KR" sz="2000" dirty="0">
-              <a:latin typeface="Arial" panose="020B0604020202020204" pitchFamily="34" charset="0"/>
-            </a:endParaRPr>
-          </a:p>
-          <a:p>
-            <a:pPr marL="0" indent="0" defTabSz="914400" eaLnBrk="0" fontAlgn="base" hangingPunct="0">
-              <a:spcBef>
-                <a:spcPct val="0"/>
-              </a:spcBef>
-              <a:spcAft>
-                <a:spcPts val="600"/>
-              </a:spcAft>
-              <a:buNone/>
-            </a:pPr>
-            <a:r>
-              <a:rPr lang="en-US" altLang="ko-KR" sz="2000" dirty="0">
-                <a:latin typeface="Arial" panose="020B0604020202020204" pitchFamily="34" charset="0"/>
-              </a:rPr>
-              <a:t>   (</a:t>
-            </a:r>
-            <a:r>
-              <a:rPr lang="ko-KR" altLang="en-US" sz="2000" dirty="0">
-                <a:latin typeface="Arial" panose="020B0604020202020204" pitchFamily="34" charset="0"/>
-              </a:rPr>
-              <a:t>새 게임 진행 시 초기화</a:t>
-            </a:r>
-            <a:r>
-              <a:rPr lang="en-US" altLang="ko-KR" sz="2000" dirty="0">
-                <a:latin typeface="Arial" panose="020B0604020202020204" pitchFamily="34" charset="0"/>
-              </a:rPr>
-              <a:t>)</a:t>
-            </a:r>
           </a:p>
           <a:p>
             <a:pPr marL="0" indent="0" defTabSz="914400" eaLnBrk="0" fontAlgn="base" hangingPunct="0">
@@ -5798,7 +5866,7 @@
         </p:nvSpPr>
         <p:spPr>
           <a:xfrm>
-            <a:off x="1137034" y="609600"/>
+            <a:off x="848159" y="412750"/>
             <a:ext cx="6881026" cy="1322887"/>
           </a:xfrm>
         </p:spPr>
@@ -5810,7 +5878,7 @@
           <a:p>
             <a:pPr latinLnBrk="0"/>
             <a:r>
-              <a:rPr lang="ko-KR" altLang="en-US" kern="1200" dirty="0">
+              <a:rPr lang="ko-KR" altLang="en-US" b="1" kern="1200" dirty="0">
                 <a:solidFill>
                   <a:schemeClr val="tx1"/>
                 </a:solidFill>
@@ -6161,6 +6229,1496 @@
     <p:extLst>
       <p:ext uri="{BB962C8B-B14F-4D97-AF65-F5344CB8AC3E}">
         <p14:creationId xmlns:p14="http://schemas.microsoft.com/office/powerpoint/2010/main" val="4087075125"/>
+      </p:ext>
+    </p:extLst>
+  </p:cSld>
+  <p:clrMapOvr>
+    <a:masterClrMapping/>
+  </p:clrMapOvr>
+</p:sld>
+</file>
+
+<file path=ppt/slides/slide8.xml><?xml version="1.0" encoding="utf-8"?>
+<p:sld xmlns:a="http://schemas.openxmlformats.org/drawingml/2006/main" xmlns:r="http://schemas.openxmlformats.org/officeDocument/2006/relationships" xmlns:p="http://schemas.openxmlformats.org/presentationml/2006/main">
+  <p:cSld>
+    <p:spTree>
+      <p:nvGrpSpPr>
+        <p:cNvPr id="1" name=""/>
+        <p:cNvGrpSpPr/>
+        <p:nvPr/>
+      </p:nvGrpSpPr>
+      <p:grpSpPr>
+        <a:xfrm>
+          <a:off x="0" y="0"/>
+          <a:ext cx="0" cy="0"/>
+          <a:chOff x="0" y="0"/>
+          <a:chExt cx="0" cy="0"/>
+        </a:xfrm>
+      </p:grpSpPr>
+      <p:sp>
+        <p:nvSpPr>
+          <p:cNvPr id="2" name="제목 1">
+            <a:extLst>
+              <a:ext uri="{FF2B5EF4-FFF2-40B4-BE49-F238E27FC236}">
+                <a16:creationId xmlns:a16="http://schemas.microsoft.com/office/drawing/2014/main" id="{286F8197-1A6D-5F0D-ECD3-36085E34A5FE}"/>
+              </a:ext>
+            </a:extLst>
+          </p:cNvPr>
+          <p:cNvSpPr>
+            <a:spLocks noGrp="1"/>
+          </p:cNvSpPr>
+          <p:nvPr>
+            <p:ph type="title"/>
+          </p:nvPr>
+        </p:nvSpPr>
+        <p:spPr/>
+        <p:txBody>
+          <a:bodyPr/>
+          <a:lstStyle/>
+          <a:p>
+            <a:r>
+              <a:rPr lang="ko-KR" altLang="en-US" b="1" dirty="0"/>
+              <a:t>게임 조작</a:t>
+            </a:r>
+          </a:p>
+        </p:txBody>
+      </p:sp>
+      <p:sp>
+        <p:nvSpPr>
+          <p:cNvPr id="3" name="내용 개체 틀 2">
+            <a:extLst>
+              <a:ext uri="{FF2B5EF4-FFF2-40B4-BE49-F238E27FC236}">
+                <a16:creationId xmlns:a16="http://schemas.microsoft.com/office/drawing/2014/main" id="{7D0892BB-F7A8-A186-6183-1F4EBA373C4A}"/>
+              </a:ext>
+            </a:extLst>
+          </p:cNvPr>
+          <p:cNvSpPr>
+            <a:spLocks noGrp="1"/>
+          </p:cNvSpPr>
+          <p:nvPr>
+            <p:ph idx="1"/>
+          </p:nvPr>
+        </p:nvSpPr>
+        <p:spPr>
+          <a:xfrm>
+            <a:off x="4750646" y="1836416"/>
+            <a:ext cx="2690707" cy="1540514"/>
+          </a:xfrm>
+        </p:spPr>
+        <p:txBody>
+          <a:bodyPr/>
+          <a:lstStyle/>
+          <a:p>
+            <a:pPr marL="0" indent="0">
+              <a:buNone/>
+            </a:pPr>
+            <a:r>
+              <a:rPr lang="en-US" altLang="ko-KR" b="1" dirty="0"/>
+              <a:t>Z : </a:t>
+            </a:r>
+            <a:r>
+              <a:rPr lang="ko-KR" altLang="en-US" b="1" dirty="0" err="1"/>
+              <a:t>대쉬</a:t>
+            </a:r>
+            <a:endParaRPr lang="en-US" altLang="ko-KR" b="1" dirty="0"/>
+          </a:p>
+          <a:p>
+            <a:pPr marL="0" indent="0">
+              <a:buNone/>
+            </a:pPr>
+            <a:r>
+              <a:rPr lang="en-US" altLang="ko-KR" b="1" dirty="0"/>
+              <a:t>X : </a:t>
+            </a:r>
+            <a:r>
+              <a:rPr lang="ko-KR" altLang="en-US" b="1" dirty="0"/>
+              <a:t>공격</a:t>
+            </a:r>
+            <a:endParaRPr lang="en-US" altLang="ko-KR" b="1" dirty="0"/>
+          </a:p>
+          <a:p>
+            <a:pPr marL="0" indent="0">
+              <a:buNone/>
+            </a:pPr>
+            <a:r>
+              <a:rPr lang="en-US" altLang="ko-KR" b="1" dirty="0"/>
+              <a:t>C : </a:t>
+            </a:r>
+            <a:r>
+              <a:rPr lang="ko-KR" altLang="en-US" b="1" dirty="0"/>
+              <a:t>점프</a:t>
+            </a:r>
+            <a:endParaRPr lang="en-US" altLang="ko-KR" b="1" dirty="0"/>
+          </a:p>
+          <a:p>
+            <a:pPr marL="0" indent="0">
+              <a:buNone/>
+            </a:pPr>
+            <a:endParaRPr lang="en-US" altLang="ko-KR" b="1" dirty="0"/>
+          </a:p>
+        </p:txBody>
+      </p:sp>
+      <p:sp>
+        <p:nvSpPr>
+          <p:cNvPr id="4" name="내용 개체 틀 2">
+            <a:extLst>
+              <a:ext uri="{FF2B5EF4-FFF2-40B4-BE49-F238E27FC236}">
+                <a16:creationId xmlns:a16="http://schemas.microsoft.com/office/drawing/2014/main" id="{AA9A27A1-BF59-D761-5810-FC61AFFA14A4}"/>
+              </a:ext>
+            </a:extLst>
+          </p:cNvPr>
+          <p:cNvSpPr txBox="1">
+            <a:spLocks/>
+          </p:cNvSpPr>
+          <p:nvPr/>
+        </p:nvSpPr>
+        <p:spPr>
+          <a:xfrm>
+            <a:off x="8123766" y="1829222"/>
+            <a:ext cx="2690707" cy="1540514"/>
+          </a:xfrm>
+          <a:prstGeom prst="rect">
+            <a:avLst/>
+          </a:prstGeom>
+        </p:spPr>
+        <p:txBody>
+          <a:bodyPr vert="horz" lIns="91440" tIns="45720" rIns="91440" bIns="45720" rtlCol="0">
+            <a:normAutofit/>
+          </a:bodyPr>
+          <a:lstStyle>
+            <a:lvl1pPr marL="228600" indent="-228600" algn="l" defTabSz="914400" rtl="0" eaLnBrk="1" latinLnBrk="1" hangingPunct="1">
+              <a:lnSpc>
+                <a:spcPct val="90000"/>
+              </a:lnSpc>
+              <a:spcBef>
+                <a:spcPts val="1000"/>
+              </a:spcBef>
+              <a:buFont typeface="Arial" panose="020B0604020202020204" pitchFamily="34" charset="0"/>
+              <a:buChar char="•"/>
+              <a:defRPr sz="2800" kern="1200">
+                <a:solidFill>
+                  <a:schemeClr val="tx1"/>
+                </a:solidFill>
+                <a:latin typeface="+mn-lt"/>
+                <a:ea typeface="+mn-ea"/>
+                <a:cs typeface="+mn-cs"/>
+              </a:defRPr>
+            </a:lvl1pPr>
+            <a:lvl2pPr marL="685800" indent="-228600" algn="l" defTabSz="914400" rtl="0" eaLnBrk="1" latinLnBrk="1" hangingPunct="1">
+              <a:lnSpc>
+                <a:spcPct val="90000"/>
+              </a:lnSpc>
+              <a:spcBef>
+                <a:spcPts val="500"/>
+              </a:spcBef>
+              <a:buFont typeface="Arial" panose="020B0604020202020204" pitchFamily="34" charset="0"/>
+              <a:buChar char="•"/>
+              <a:defRPr sz="2400" kern="1200">
+                <a:solidFill>
+                  <a:schemeClr val="tx1"/>
+                </a:solidFill>
+                <a:latin typeface="+mn-lt"/>
+                <a:ea typeface="+mn-ea"/>
+                <a:cs typeface="+mn-cs"/>
+              </a:defRPr>
+            </a:lvl2pPr>
+            <a:lvl3pPr marL="1143000" indent="-228600" algn="l" defTabSz="914400" rtl="0" eaLnBrk="1" latinLnBrk="1" hangingPunct="1">
+              <a:lnSpc>
+                <a:spcPct val="90000"/>
+              </a:lnSpc>
+              <a:spcBef>
+                <a:spcPts val="500"/>
+              </a:spcBef>
+              <a:buFont typeface="Arial" panose="020B0604020202020204" pitchFamily="34" charset="0"/>
+              <a:buChar char="•"/>
+              <a:defRPr sz="2000" kern="1200">
+                <a:solidFill>
+                  <a:schemeClr val="tx1"/>
+                </a:solidFill>
+                <a:latin typeface="+mn-lt"/>
+                <a:ea typeface="+mn-ea"/>
+                <a:cs typeface="+mn-cs"/>
+              </a:defRPr>
+            </a:lvl3pPr>
+            <a:lvl4pPr marL="1600200" indent="-228600" algn="l" defTabSz="914400" rtl="0" eaLnBrk="1" latinLnBrk="1" hangingPunct="1">
+              <a:lnSpc>
+                <a:spcPct val="90000"/>
+              </a:lnSpc>
+              <a:spcBef>
+                <a:spcPts val="500"/>
+              </a:spcBef>
+              <a:buFont typeface="Arial" panose="020B0604020202020204" pitchFamily="34" charset="0"/>
+              <a:buChar char="•"/>
+              <a:defRPr sz="1800" kern="1200">
+                <a:solidFill>
+                  <a:schemeClr val="tx1"/>
+                </a:solidFill>
+                <a:latin typeface="+mn-lt"/>
+                <a:ea typeface="+mn-ea"/>
+                <a:cs typeface="+mn-cs"/>
+              </a:defRPr>
+            </a:lvl4pPr>
+            <a:lvl5pPr marL="2057400" indent="-228600" algn="l" defTabSz="914400" rtl="0" eaLnBrk="1" latinLnBrk="1" hangingPunct="1">
+              <a:lnSpc>
+                <a:spcPct val="90000"/>
+              </a:lnSpc>
+              <a:spcBef>
+                <a:spcPts val="500"/>
+              </a:spcBef>
+              <a:buFont typeface="Arial" panose="020B0604020202020204" pitchFamily="34" charset="0"/>
+              <a:buChar char="•"/>
+              <a:defRPr sz="1800" kern="1200">
+                <a:solidFill>
+                  <a:schemeClr val="tx1"/>
+                </a:solidFill>
+                <a:latin typeface="+mn-lt"/>
+                <a:ea typeface="+mn-ea"/>
+                <a:cs typeface="+mn-cs"/>
+              </a:defRPr>
+            </a:lvl5pPr>
+            <a:lvl6pPr marL="2514600" indent="-228600" algn="l" defTabSz="914400" rtl="0" eaLnBrk="1" latinLnBrk="1" hangingPunct="1">
+              <a:lnSpc>
+                <a:spcPct val="90000"/>
+              </a:lnSpc>
+              <a:spcBef>
+                <a:spcPts val="500"/>
+              </a:spcBef>
+              <a:buFont typeface="Arial" panose="020B0604020202020204" pitchFamily="34" charset="0"/>
+              <a:buChar char="•"/>
+              <a:defRPr sz="1800" kern="1200">
+                <a:solidFill>
+                  <a:schemeClr val="tx1"/>
+                </a:solidFill>
+                <a:latin typeface="+mn-lt"/>
+                <a:ea typeface="+mn-ea"/>
+                <a:cs typeface="+mn-cs"/>
+              </a:defRPr>
+            </a:lvl6pPr>
+            <a:lvl7pPr marL="2971800" indent="-228600" algn="l" defTabSz="914400" rtl="0" eaLnBrk="1" latinLnBrk="1" hangingPunct="1">
+              <a:lnSpc>
+                <a:spcPct val="90000"/>
+              </a:lnSpc>
+              <a:spcBef>
+                <a:spcPts val="500"/>
+              </a:spcBef>
+              <a:buFont typeface="Arial" panose="020B0604020202020204" pitchFamily="34" charset="0"/>
+              <a:buChar char="•"/>
+              <a:defRPr sz="1800" kern="1200">
+                <a:solidFill>
+                  <a:schemeClr val="tx1"/>
+                </a:solidFill>
+                <a:latin typeface="+mn-lt"/>
+                <a:ea typeface="+mn-ea"/>
+                <a:cs typeface="+mn-cs"/>
+              </a:defRPr>
+            </a:lvl7pPr>
+            <a:lvl8pPr marL="3429000" indent="-228600" algn="l" defTabSz="914400" rtl="0" eaLnBrk="1" latinLnBrk="1" hangingPunct="1">
+              <a:lnSpc>
+                <a:spcPct val="90000"/>
+              </a:lnSpc>
+              <a:spcBef>
+                <a:spcPts val="500"/>
+              </a:spcBef>
+              <a:buFont typeface="Arial" panose="020B0604020202020204" pitchFamily="34" charset="0"/>
+              <a:buChar char="•"/>
+              <a:defRPr sz="1800" kern="1200">
+                <a:solidFill>
+                  <a:schemeClr val="tx1"/>
+                </a:solidFill>
+                <a:latin typeface="+mn-lt"/>
+                <a:ea typeface="+mn-ea"/>
+                <a:cs typeface="+mn-cs"/>
+              </a:defRPr>
+            </a:lvl8pPr>
+            <a:lvl9pPr marL="3886200" indent="-228600" algn="l" defTabSz="914400" rtl="0" eaLnBrk="1" latinLnBrk="1" hangingPunct="1">
+              <a:lnSpc>
+                <a:spcPct val="90000"/>
+              </a:lnSpc>
+              <a:spcBef>
+                <a:spcPts val="500"/>
+              </a:spcBef>
+              <a:buFont typeface="Arial" panose="020B0604020202020204" pitchFamily="34" charset="0"/>
+              <a:buChar char="•"/>
+              <a:defRPr sz="1800" kern="1200">
+                <a:solidFill>
+                  <a:schemeClr val="tx1"/>
+                </a:solidFill>
+                <a:latin typeface="+mn-lt"/>
+                <a:ea typeface="+mn-ea"/>
+                <a:cs typeface="+mn-cs"/>
+              </a:defRPr>
+            </a:lvl9pPr>
+          </a:lstStyle>
+          <a:p>
+            <a:pPr marL="0" indent="0">
+              <a:buFont typeface="Arial" panose="020B0604020202020204" pitchFamily="34" charset="0"/>
+              <a:buNone/>
+            </a:pPr>
+            <a:r>
+              <a:rPr lang="en-US" altLang="ko-KR" b="1" dirty="0"/>
+              <a:t>A : </a:t>
+            </a:r>
+            <a:r>
+              <a:rPr lang="ko-KR" altLang="en-US" b="1" dirty="0"/>
+              <a:t>스킬</a:t>
+            </a:r>
+            <a:r>
+              <a:rPr lang="en-US" altLang="ko-KR" b="1" dirty="0"/>
+              <a:t>1</a:t>
+            </a:r>
+          </a:p>
+          <a:p>
+            <a:pPr marL="0" indent="0">
+              <a:buFont typeface="Arial" panose="020B0604020202020204" pitchFamily="34" charset="0"/>
+              <a:buNone/>
+            </a:pPr>
+            <a:r>
+              <a:rPr lang="en-US" altLang="ko-KR" b="1" dirty="0"/>
+              <a:t>S : </a:t>
+            </a:r>
+            <a:r>
+              <a:rPr lang="ko-KR" altLang="en-US" b="1" dirty="0"/>
+              <a:t>스킬</a:t>
+            </a:r>
+            <a:r>
+              <a:rPr lang="en-US" altLang="ko-KR" b="1" dirty="0"/>
+              <a:t>2</a:t>
+            </a:r>
+          </a:p>
+          <a:p>
+            <a:pPr marL="0" indent="0">
+              <a:buFont typeface="Arial" panose="020B0604020202020204" pitchFamily="34" charset="0"/>
+              <a:buNone/>
+            </a:pPr>
+            <a:r>
+              <a:rPr lang="en-US" altLang="ko-KR" b="1" dirty="0"/>
+              <a:t>D : </a:t>
+            </a:r>
+            <a:r>
+              <a:rPr lang="ko-KR" altLang="en-US" b="1" dirty="0"/>
+              <a:t>스킬</a:t>
+            </a:r>
+            <a:r>
+              <a:rPr lang="en-US" altLang="ko-KR" b="1" dirty="0"/>
+              <a:t>3</a:t>
+            </a:r>
+          </a:p>
+          <a:p>
+            <a:pPr marL="0" indent="0">
+              <a:buFont typeface="Arial" panose="020B0604020202020204" pitchFamily="34" charset="0"/>
+              <a:buNone/>
+            </a:pPr>
+            <a:endParaRPr lang="en-US" altLang="ko-KR" b="1" dirty="0"/>
+          </a:p>
+        </p:txBody>
+      </p:sp>
+      <p:sp>
+        <p:nvSpPr>
+          <p:cNvPr id="5" name="내용 개체 틀 2">
+            <a:extLst>
+              <a:ext uri="{FF2B5EF4-FFF2-40B4-BE49-F238E27FC236}">
+                <a16:creationId xmlns:a16="http://schemas.microsoft.com/office/drawing/2014/main" id="{CC68FFED-E035-0354-F09F-7D7E622A8D1C}"/>
+              </a:ext>
+            </a:extLst>
+          </p:cNvPr>
+          <p:cNvSpPr txBox="1">
+            <a:spLocks/>
+          </p:cNvSpPr>
+          <p:nvPr/>
+        </p:nvSpPr>
+        <p:spPr>
+          <a:xfrm>
+            <a:off x="889847" y="1829222"/>
+            <a:ext cx="3178386" cy="2218264"/>
+          </a:xfrm>
+          <a:prstGeom prst="rect">
+            <a:avLst/>
+          </a:prstGeom>
+        </p:spPr>
+        <p:txBody>
+          <a:bodyPr vert="horz" lIns="91440" tIns="45720" rIns="91440" bIns="45720" rtlCol="0">
+            <a:normAutofit/>
+          </a:bodyPr>
+          <a:lstStyle>
+            <a:lvl1pPr marL="228600" indent="-228600" algn="l" defTabSz="914400" rtl="0" eaLnBrk="1" latinLnBrk="1" hangingPunct="1">
+              <a:lnSpc>
+                <a:spcPct val="90000"/>
+              </a:lnSpc>
+              <a:spcBef>
+                <a:spcPts val="1000"/>
+              </a:spcBef>
+              <a:buFont typeface="Arial" panose="020B0604020202020204" pitchFamily="34" charset="0"/>
+              <a:buChar char="•"/>
+              <a:defRPr sz="2800" kern="1200">
+                <a:solidFill>
+                  <a:schemeClr val="tx1"/>
+                </a:solidFill>
+                <a:latin typeface="+mn-lt"/>
+                <a:ea typeface="+mn-ea"/>
+                <a:cs typeface="+mn-cs"/>
+              </a:defRPr>
+            </a:lvl1pPr>
+            <a:lvl2pPr marL="685800" indent="-228600" algn="l" defTabSz="914400" rtl="0" eaLnBrk="1" latinLnBrk="1" hangingPunct="1">
+              <a:lnSpc>
+                <a:spcPct val="90000"/>
+              </a:lnSpc>
+              <a:spcBef>
+                <a:spcPts val="500"/>
+              </a:spcBef>
+              <a:buFont typeface="Arial" panose="020B0604020202020204" pitchFamily="34" charset="0"/>
+              <a:buChar char="•"/>
+              <a:defRPr sz="2400" kern="1200">
+                <a:solidFill>
+                  <a:schemeClr val="tx1"/>
+                </a:solidFill>
+                <a:latin typeface="+mn-lt"/>
+                <a:ea typeface="+mn-ea"/>
+                <a:cs typeface="+mn-cs"/>
+              </a:defRPr>
+            </a:lvl2pPr>
+            <a:lvl3pPr marL="1143000" indent="-228600" algn="l" defTabSz="914400" rtl="0" eaLnBrk="1" latinLnBrk="1" hangingPunct="1">
+              <a:lnSpc>
+                <a:spcPct val="90000"/>
+              </a:lnSpc>
+              <a:spcBef>
+                <a:spcPts val="500"/>
+              </a:spcBef>
+              <a:buFont typeface="Arial" panose="020B0604020202020204" pitchFamily="34" charset="0"/>
+              <a:buChar char="•"/>
+              <a:defRPr sz="2000" kern="1200">
+                <a:solidFill>
+                  <a:schemeClr val="tx1"/>
+                </a:solidFill>
+                <a:latin typeface="+mn-lt"/>
+                <a:ea typeface="+mn-ea"/>
+                <a:cs typeface="+mn-cs"/>
+              </a:defRPr>
+            </a:lvl3pPr>
+            <a:lvl4pPr marL="1600200" indent="-228600" algn="l" defTabSz="914400" rtl="0" eaLnBrk="1" latinLnBrk="1" hangingPunct="1">
+              <a:lnSpc>
+                <a:spcPct val="90000"/>
+              </a:lnSpc>
+              <a:spcBef>
+                <a:spcPts val="500"/>
+              </a:spcBef>
+              <a:buFont typeface="Arial" panose="020B0604020202020204" pitchFamily="34" charset="0"/>
+              <a:buChar char="•"/>
+              <a:defRPr sz="1800" kern="1200">
+                <a:solidFill>
+                  <a:schemeClr val="tx1"/>
+                </a:solidFill>
+                <a:latin typeface="+mn-lt"/>
+                <a:ea typeface="+mn-ea"/>
+                <a:cs typeface="+mn-cs"/>
+              </a:defRPr>
+            </a:lvl4pPr>
+            <a:lvl5pPr marL="2057400" indent="-228600" algn="l" defTabSz="914400" rtl="0" eaLnBrk="1" latinLnBrk="1" hangingPunct="1">
+              <a:lnSpc>
+                <a:spcPct val="90000"/>
+              </a:lnSpc>
+              <a:spcBef>
+                <a:spcPts val="500"/>
+              </a:spcBef>
+              <a:buFont typeface="Arial" panose="020B0604020202020204" pitchFamily="34" charset="0"/>
+              <a:buChar char="•"/>
+              <a:defRPr sz="1800" kern="1200">
+                <a:solidFill>
+                  <a:schemeClr val="tx1"/>
+                </a:solidFill>
+                <a:latin typeface="+mn-lt"/>
+                <a:ea typeface="+mn-ea"/>
+                <a:cs typeface="+mn-cs"/>
+              </a:defRPr>
+            </a:lvl5pPr>
+            <a:lvl6pPr marL="2514600" indent="-228600" algn="l" defTabSz="914400" rtl="0" eaLnBrk="1" latinLnBrk="1" hangingPunct="1">
+              <a:lnSpc>
+                <a:spcPct val="90000"/>
+              </a:lnSpc>
+              <a:spcBef>
+                <a:spcPts val="500"/>
+              </a:spcBef>
+              <a:buFont typeface="Arial" panose="020B0604020202020204" pitchFamily="34" charset="0"/>
+              <a:buChar char="•"/>
+              <a:defRPr sz="1800" kern="1200">
+                <a:solidFill>
+                  <a:schemeClr val="tx1"/>
+                </a:solidFill>
+                <a:latin typeface="+mn-lt"/>
+                <a:ea typeface="+mn-ea"/>
+                <a:cs typeface="+mn-cs"/>
+              </a:defRPr>
+            </a:lvl6pPr>
+            <a:lvl7pPr marL="2971800" indent="-228600" algn="l" defTabSz="914400" rtl="0" eaLnBrk="1" latinLnBrk="1" hangingPunct="1">
+              <a:lnSpc>
+                <a:spcPct val="90000"/>
+              </a:lnSpc>
+              <a:spcBef>
+                <a:spcPts val="500"/>
+              </a:spcBef>
+              <a:buFont typeface="Arial" panose="020B0604020202020204" pitchFamily="34" charset="0"/>
+              <a:buChar char="•"/>
+              <a:defRPr sz="1800" kern="1200">
+                <a:solidFill>
+                  <a:schemeClr val="tx1"/>
+                </a:solidFill>
+                <a:latin typeface="+mn-lt"/>
+                <a:ea typeface="+mn-ea"/>
+                <a:cs typeface="+mn-cs"/>
+              </a:defRPr>
+            </a:lvl7pPr>
+            <a:lvl8pPr marL="3429000" indent="-228600" algn="l" defTabSz="914400" rtl="0" eaLnBrk="1" latinLnBrk="1" hangingPunct="1">
+              <a:lnSpc>
+                <a:spcPct val="90000"/>
+              </a:lnSpc>
+              <a:spcBef>
+                <a:spcPts val="500"/>
+              </a:spcBef>
+              <a:buFont typeface="Arial" panose="020B0604020202020204" pitchFamily="34" charset="0"/>
+              <a:buChar char="•"/>
+              <a:defRPr sz="1800" kern="1200">
+                <a:solidFill>
+                  <a:schemeClr val="tx1"/>
+                </a:solidFill>
+                <a:latin typeface="+mn-lt"/>
+                <a:ea typeface="+mn-ea"/>
+                <a:cs typeface="+mn-cs"/>
+              </a:defRPr>
+            </a:lvl8pPr>
+            <a:lvl9pPr marL="3886200" indent="-228600" algn="l" defTabSz="914400" rtl="0" eaLnBrk="1" latinLnBrk="1" hangingPunct="1">
+              <a:lnSpc>
+                <a:spcPct val="90000"/>
+              </a:lnSpc>
+              <a:spcBef>
+                <a:spcPts val="500"/>
+              </a:spcBef>
+              <a:buFont typeface="Arial" panose="020B0604020202020204" pitchFamily="34" charset="0"/>
+              <a:buChar char="•"/>
+              <a:defRPr sz="1800" kern="1200">
+                <a:solidFill>
+                  <a:schemeClr val="tx1"/>
+                </a:solidFill>
+                <a:latin typeface="+mn-lt"/>
+                <a:ea typeface="+mn-ea"/>
+                <a:cs typeface="+mn-cs"/>
+              </a:defRPr>
+            </a:lvl9pPr>
+          </a:lstStyle>
+          <a:p>
+            <a:pPr marL="0" indent="0">
+              <a:buFont typeface="Arial" panose="020B0604020202020204" pitchFamily="34" charset="0"/>
+              <a:buNone/>
+            </a:pPr>
+            <a:r>
+              <a:rPr lang="ko-KR" altLang="en-US" b="1" dirty="0"/>
+              <a:t>← </a:t>
+            </a:r>
+            <a:r>
+              <a:rPr lang="en-US" altLang="ko-KR" b="1" dirty="0"/>
+              <a:t>: </a:t>
+            </a:r>
+            <a:r>
+              <a:rPr lang="ko-KR" altLang="en-US" b="1" dirty="0"/>
+              <a:t>좌 이동</a:t>
+            </a:r>
+            <a:endParaRPr lang="en-US" altLang="ko-KR" b="1" dirty="0"/>
+          </a:p>
+          <a:p>
+            <a:pPr marL="0" indent="0">
+              <a:buFont typeface="Arial" panose="020B0604020202020204" pitchFamily="34" charset="0"/>
+              <a:buNone/>
+            </a:pPr>
+            <a:r>
+              <a:rPr lang="ko-KR" altLang="en-US" b="1" dirty="0"/>
+              <a:t>→ </a:t>
+            </a:r>
+            <a:r>
+              <a:rPr lang="en-US" altLang="ko-KR" b="1" dirty="0"/>
+              <a:t>: </a:t>
+            </a:r>
+            <a:r>
+              <a:rPr lang="ko-KR" altLang="en-US" b="1" dirty="0"/>
+              <a:t>우 이동</a:t>
+            </a:r>
+            <a:endParaRPr lang="en-US" altLang="ko-KR" b="1" dirty="0"/>
+          </a:p>
+          <a:p>
+            <a:pPr marL="0" indent="0">
+              <a:buFont typeface="Arial" panose="020B0604020202020204" pitchFamily="34" charset="0"/>
+              <a:buNone/>
+            </a:pPr>
+            <a:r>
+              <a:rPr lang="ko-KR" altLang="en-US" b="1" dirty="0"/>
+              <a:t>↓ </a:t>
+            </a:r>
+            <a:r>
+              <a:rPr lang="en-US" altLang="ko-KR" b="1" dirty="0"/>
+              <a:t>+ C : </a:t>
+            </a:r>
+            <a:r>
+              <a:rPr lang="ko-KR" altLang="en-US" b="1" dirty="0"/>
+              <a:t>하단 점프</a:t>
+            </a:r>
+            <a:endParaRPr lang="en-US" altLang="ko-KR" b="1" dirty="0"/>
+          </a:p>
+          <a:p>
+            <a:pPr marL="0" indent="0">
+              <a:buNone/>
+            </a:pPr>
+            <a:r>
+              <a:rPr lang="en-US" altLang="ko-KR" b="1" dirty="0"/>
+              <a:t>ESC : </a:t>
+            </a:r>
+            <a:r>
+              <a:rPr lang="ko-KR" altLang="en-US" b="1" dirty="0"/>
+              <a:t>메뉴</a:t>
+            </a:r>
+            <a:endParaRPr lang="en-US" altLang="ko-KR" b="1" dirty="0"/>
+          </a:p>
+          <a:p>
+            <a:pPr marL="0" indent="0">
+              <a:buFont typeface="Arial" panose="020B0604020202020204" pitchFamily="34" charset="0"/>
+              <a:buNone/>
+            </a:pPr>
+            <a:endParaRPr lang="en-US" altLang="ko-KR" b="1" dirty="0"/>
+          </a:p>
+          <a:p>
+            <a:pPr marL="0" indent="0">
+              <a:buFont typeface="Arial" panose="020B0604020202020204" pitchFamily="34" charset="0"/>
+              <a:buNone/>
+            </a:pPr>
+            <a:endParaRPr lang="en-US" altLang="ko-KR" b="1" dirty="0"/>
+          </a:p>
+        </p:txBody>
+      </p:sp>
+      <p:sp>
+        <p:nvSpPr>
+          <p:cNvPr id="7" name="내용 개체 틀 2">
+            <a:extLst>
+              <a:ext uri="{FF2B5EF4-FFF2-40B4-BE49-F238E27FC236}">
+                <a16:creationId xmlns:a16="http://schemas.microsoft.com/office/drawing/2014/main" id="{1321B627-9A3E-2FE9-51F7-24EADE119D0A}"/>
+              </a:ext>
+            </a:extLst>
+          </p:cNvPr>
+          <p:cNvSpPr txBox="1">
+            <a:spLocks/>
+          </p:cNvSpPr>
+          <p:nvPr/>
+        </p:nvSpPr>
+        <p:spPr>
+          <a:xfrm>
+            <a:off x="838200" y="4685774"/>
+            <a:ext cx="4940300" cy="1325562"/>
+          </a:xfrm>
+          <a:prstGeom prst="rect">
+            <a:avLst/>
+          </a:prstGeom>
+        </p:spPr>
+        <p:txBody>
+          <a:bodyPr vert="horz" lIns="91440" tIns="45720" rIns="91440" bIns="45720" rtlCol="0">
+            <a:normAutofit/>
+          </a:bodyPr>
+          <a:lstStyle>
+            <a:lvl1pPr marL="228600" indent="-228600" algn="l" defTabSz="914400" rtl="0" eaLnBrk="1" latinLnBrk="1" hangingPunct="1">
+              <a:lnSpc>
+                <a:spcPct val="90000"/>
+              </a:lnSpc>
+              <a:spcBef>
+                <a:spcPts val="1000"/>
+              </a:spcBef>
+              <a:buFont typeface="Arial" panose="020B0604020202020204" pitchFamily="34" charset="0"/>
+              <a:buChar char="•"/>
+              <a:defRPr sz="2800" kern="1200">
+                <a:solidFill>
+                  <a:schemeClr val="tx1"/>
+                </a:solidFill>
+                <a:latin typeface="+mn-lt"/>
+                <a:ea typeface="+mn-ea"/>
+                <a:cs typeface="+mn-cs"/>
+              </a:defRPr>
+            </a:lvl1pPr>
+            <a:lvl2pPr marL="685800" indent="-228600" algn="l" defTabSz="914400" rtl="0" eaLnBrk="1" latinLnBrk="1" hangingPunct="1">
+              <a:lnSpc>
+                <a:spcPct val="90000"/>
+              </a:lnSpc>
+              <a:spcBef>
+                <a:spcPts val="500"/>
+              </a:spcBef>
+              <a:buFont typeface="Arial" panose="020B0604020202020204" pitchFamily="34" charset="0"/>
+              <a:buChar char="•"/>
+              <a:defRPr sz="2400" kern="1200">
+                <a:solidFill>
+                  <a:schemeClr val="tx1"/>
+                </a:solidFill>
+                <a:latin typeface="+mn-lt"/>
+                <a:ea typeface="+mn-ea"/>
+                <a:cs typeface="+mn-cs"/>
+              </a:defRPr>
+            </a:lvl2pPr>
+            <a:lvl3pPr marL="1143000" indent="-228600" algn="l" defTabSz="914400" rtl="0" eaLnBrk="1" latinLnBrk="1" hangingPunct="1">
+              <a:lnSpc>
+                <a:spcPct val="90000"/>
+              </a:lnSpc>
+              <a:spcBef>
+                <a:spcPts val="500"/>
+              </a:spcBef>
+              <a:buFont typeface="Arial" panose="020B0604020202020204" pitchFamily="34" charset="0"/>
+              <a:buChar char="•"/>
+              <a:defRPr sz="2000" kern="1200">
+                <a:solidFill>
+                  <a:schemeClr val="tx1"/>
+                </a:solidFill>
+                <a:latin typeface="+mn-lt"/>
+                <a:ea typeface="+mn-ea"/>
+                <a:cs typeface="+mn-cs"/>
+              </a:defRPr>
+            </a:lvl3pPr>
+            <a:lvl4pPr marL="1600200" indent="-228600" algn="l" defTabSz="914400" rtl="0" eaLnBrk="1" latinLnBrk="1" hangingPunct="1">
+              <a:lnSpc>
+                <a:spcPct val="90000"/>
+              </a:lnSpc>
+              <a:spcBef>
+                <a:spcPts val="500"/>
+              </a:spcBef>
+              <a:buFont typeface="Arial" panose="020B0604020202020204" pitchFamily="34" charset="0"/>
+              <a:buChar char="•"/>
+              <a:defRPr sz="1800" kern="1200">
+                <a:solidFill>
+                  <a:schemeClr val="tx1"/>
+                </a:solidFill>
+                <a:latin typeface="+mn-lt"/>
+                <a:ea typeface="+mn-ea"/>
+                <a:cs typeface="+mn-cs"/>
+              </a:defRPr>
+            </a:lvl4pPr>
+            <a:lvl5pPr marL="2057400" indent="-228600" algn="l" defTabSz="914400" rtl="0" eaLnBrk="1" latinLnBrk="1" hangingPunct="1">
+              <a:lnSpc>
+                <a:spcPct val="90000"/>
+              </a:lnSpc>
+              <a:spcBef>
+                <a:spcPts val="500"/>
+              </a:spcBef>
+              <a:buFont typeface="Arial" panose="020B0604020202020204" pitchFamily="34" charset="0"/>
+              <a:buChar char="•"/>
+              <a:defRPr sz="1800" kern="1200">
+                <a:solidFill>
+                  <a:schemeClr val="tx1"/>
+                </a:solidFill>
+                <a:latin typeface="+mn-lt"/>
+                <a:ea typeface="+mn-ea"/>
+                <a:cs typeface="+mn-cs"/>
+              </a:defRPr>
+            </a:lvl5pPr>
+            <a:lvl6pPr marL="2514600" indent="-228600" algn="l" defTabSz="914400" rtl="0" eaLnBrk="1" latinLnBrk="1" hangingPunct="1">
+              <a:lnSpc>
+                <a:spcPct val="90000"/>
+              </a:lnSpc>
+              <a:spcBef>
+                <a:spcPts val="500"/>
+              </a:spcBef>
+              <a:buFont typeface="Arial" panose="020B0604020202020204" pitchFamily="34" charset="0"/>
+              <a:buChar char="•"/>
+              <a:defRPr sz="1800" kern="1200">
+                <a:solidFill>
+                  <a:schemeClr val="tx1"/>
+                </a:solidFill>
+                <a:latin typeface="+mn-lt"/>
+                <a:ea typeface="+mn-ea"/>
+                <a:cs typeface="+mn-cs"/>
+              </a:defRPr>
+            </a:lvl6pPr>
+            <a:lvl7pPr marL="2971800" indent="-228600" algn="l" defTabSz="914400" rtl="0" eaLnBrk="1" latinLnBrk="1" hangingPunct="1">
+              <a:lnSpc>
+                <a:spcPct val="90000"/>
+              </a:lnSpc>
+              <a:spcBef>
+                <a:spcPts val="500"/>
+              </a:spcBef>
+              <a:buFont typeface="Arial" panose="020B0604020202020204" pitchFamily="34" charset="0"/>
+              <a:buChar char="•"/>
+              <a:defRPr sz="1800" kern="1200">
+                <a:solidFill>
+                  <a:schemeClr val="tx1"/>
+                </a:solidFill>
+                <a:latin typeface="+mn-lt"/>
+                <a:ea typeface="+mn-ea"/>
+                <a:cs typeface="+mn-cs"/>
+              </a:defRPr>
+            </a:lvl7pPr>
+            <a:lvl8pPr marL="3429000" indent="-228600" algn="l" defTabSz="914400" rtl="0" eaLnBrk="1" latinLnBrk="1" hangingPunct="1">
+              <a:lnSpc>
+                <a:spcPct val="90000"/>
+              </a:lnSpc>
+              <a:spcBef>
+                <a:spcPts val="500"/>
+              </a:spcBef>
+              <a:buFont typeface="Arial" panose="020B0604020202020204" pitchFamily="34" charset="0"/>
+              <a:buChar char="•"/>
+              <a:defRPr sz="1800" kern="1200">
+                <a:solidFill>
+                  <a:schemeClr val="tx1"/>
+                </a:solidFill>
+                <a:latin typeface="+mn-lt"/>
+                <a:ea typeface="+mn-ea"/>
+                <a:cs typeface="+mn-cs"/>
+              </a:defRPr>
+            </a:lvl8pPr>
+            <a:lvl9pPr marL="3886200" indent="-228600" algn="l" defTabSz="914400" rtl="0" eaLnBrk="1" latinLnBrk="1" hangingPunct="1">
+              <a:lnSpc>
+                <a:spcPct val="90000"/>
+              </a:lnSpc>
+              <a:spcBef>
+                <a:spcPts val="500"/>
+              </a:spcBef>
+              <a:buFont typeface="Arial" panose="020B0604020202020204" pitchFamily="34" charset="0"/>
+              <a:buChar char="•"/>
+              <a:defRPr sz="1800" kern="1200">
+                <a:solidFill>
+                  <a:schemeClr val="tx1"/>
+                </a:solidFill>
+                <a:latin typeface="+mn-lt"/>
+                <a:ea typeface="+mn-ea"/>
+                <a:cs typeface="+mn-cs"/>
+              </a:defRPr>
+            </a:lvl9pPr>
+          </a:lstStyle>
+          <a:p>
+            <a:pPr marL="0" indent="0">
+              <a:buNone/>
+            </a:pPr>
+            <a:r>
+              <a:rPr lang="en-US" altLang="ko-KR" sz="2000" b="1" dirty="0"/>
+              <a:t>* </a:t>
+            </a:r>
+            <a:r>
+              <a:rPr lang="ko-KR" altLang="en-US" sz="2000" b="1" dirty="0" err="1"/>
+              <a:t>대쉬</a:t>
+            </a:r>
+            <a:r>
+              <a:rPr lang="ko-KR" altLang="en-US" sz="2000" b="1" dirty="0"/>
+              <a:t> 중 무적</a:t>
+            </a:r>
+            <a:r>
+              <a:rPr lang="en-US" altLang="ko-KR" sz="2000" b="1" dirty="0"/>
+              <a:t>.</a:t>
+            </a:r>
+          </a:p>
+          <a:p>
+            <a:pPr marL="0" indent="0">
+              <a:buNone/>
+            </a:pPr>
+            <a:r>
+              <a:rPr lang="en-US" altLang="ko-KR" sz="2000" b="1" dirty="0"/>
+              <a:t>* </a:t>
+            </a:r>
+            <a:r>
+              <a:rPr lang="ko-KR" altLang="en-US" sz="2000" b="1" dirty="0" err="1"/>
+              <a:t>대쉬는</a:t>
+            </a:r>
+            <a:r>
+              <a:rPr lang="ko-KR" altLang="en-US" sz="2000" b="1" dirty="0"/>
+              <a:t> 연속 </a:t>
+            </a:r>
+            <a:r>
+              <a:rPr lang="en-US" altLang="ko-KR" sz="2000" b="1" dirty="0"/>
+              <a:t>2</a:t>
+            </a:r>
+            <a:r>
+              <a:rPr lang="ko-KR" altLang="en-US" sz="2000" b="1" dirty="0"/>
+              <a:t>번까지 사용 가능</a:t>
+            </a:r>
+            <a:r>
+              <a:rPr lang="en-US" altLang="ko-KR" sz="2000" b="1" dirty="0"/>
+              <a:t>.</a:t>
+            </a:r>
+          </a:p>
+          <a:p>
+            <a:pPr marL="0" indent="0">
+              <a:buNone/>
+            </a:pPr>
+            <a:r>
+              <a:rPr lang="en-US" altLang="ko-KR" sz="2000" b="1" dirty="0"/>
+              <a:t>* </a:t>
+            </a:r>
+            <a:r>
+              <a:rPr lang="ko-KR" altLang="en-US" sz="2000" b="1" dirty="0" err="1"/>
+              <a:t>대쉬</a:t>
+            </a:r>
+            <a:r>
+              <a:rPr lang="ko-KR" altLang="en-US" sz="2000" b="1" dirty="0"/>
+              <a:t> 사용 후 </a:t>
+            </a:r>
+            <a:r>
+              <a:rPr lang="ko-KR" altLang="en-US" sz="2000" b="1" dirty="0" err="1"/>
+              <a:t>쿨타임</a:t>
+            </a:r>
+            <a:r>
+              <a:rPr lang="ko-KR" altLang="en-US" sz="2000" b="1" dirty="0"/>
+              <a:t> 적용</a:t>
+            </a:r>
+            <a:r>
+              <a:rPr lang="en-US" altLang="ko-KR" sz="2000" b="1" dirty="0"/>
+              <a:t>.</a:t>
+            </a:r>
+          </a:p>
+        </p:txBody>
+      </p:sp>
+    </p:spTree>
+    <p:extLst>
+      <p:ext uri="{BB962C8B-B14F-4D97-AF65-F5344CB8AC3E}">
+        <p14:creationId xmlns:p14="http://schemas.microsoft.com/office/powerpoint/2010/main" val="1530094733"/>
+      </p:ext>
+    </p:extLst>
+  </p:cSld>
+  <p:clrMapOvr>
+    <a:masterClrMapping/>
+  </p:clrMapOvr>
+</p:sld>
+</file>
+
+<file path=ppt/slides/slide9.xml><?xml version="1.0" encoding="utf-8"?>
+<p:sld xmlns:a="http://schemas.openxmlformats.org/drawingml/2006/main" xmlns:r="http://schemas.openxmlformats.org/officeDocument/2006/relationships" xmlns:p="http://schemas.openxmlformats.org/presentationml/2006/main">
+  <p:cSld>
+    <p:spTree>
+      <p:nvGrpSpPr>
+        <p:cNvPr id="1" name=""/>
+        <p:cNvGrpSpPr/>
+        <p:nvPr/>
+      </p:nvGrpSpPr>
+      <p:grpSpPr>
+        <a:xfrm>
+          <a:off x="0" y="0"/>
+          <a:ext cx="0" cy="0"/>
+          <a:chOff x="0" y="0"/>
+          <a:chExt cx="0" cy="0"/>
+        </a:xfrm>
+      </p:grpSpPr>
+      <p:sp>
+        <p:nvSpPr>
+          <p:cNvPr id="9" name="제목 1">
+            <a:extLst>
+              <a:ext uri="{FF2B5EF4-FFF2-40B4-BE49-F238E27FC236}">
+                <a16:creationId xmlns:a16="http://schemas.microsoft.com/office/drawing/2014/main" id="{52A7CB8C-8419-1226-9CAE-6A2750035F46}"/>
+              </a:ext>
+            </a:extLst>
+          </p:cNvPr>
+          <p:cNvSpPr txBox="1">
+            <a:spLocks/>
+          </p:cNvSpPr>
+          <p:nvPr/>
+        </p:nvSpPr>
+        <p:spPr>
+          <a:xfrm>
+            <a:off x="848159" y="412750"/>
+            <a:ext cx="6881026" cy="1322887"/>
+          </a:xfrm>
+          <a:prstGeom prst="rect">
+            <a:avLst/>
+          </a:prstGeom>
+        </p:spPr>
+        <p:txBody>
+          <a:bodyPr vert="horz" lIns="91440" tIns="45720" rIns="91440" bIns="45720" rtlCol="0" anchor="ctr">
+            <a:normAutofit/>
+          </a:bodyPr>
+          <a:lstStyle>
+            <a:lvl1pPr algn="ctr" defTabSz="914400" rtl="0" eaLnBrk="1" latinLnBrk="1" hangingPunct="1">
+              <a:lnSpc>
+                <a:spcPct val="90000"/>
+              </a:lnSpc>
+              <a:spcBef>
+                <a:spcPct val="0"/>
+              </a:spcBef>
+              <a:buNone/>
+              <a:defRPr sz="6000" kern="1200">
+                <a:solidFill>
+                  <a:schemeClr val="tx1"/>
+                </a:solidFill>
+                <a:latin typeface="+mj-lt"/>
+                <a:ea typeface="+mj-ea"/>
+                <a:cs typeface="+mj-cs"/>
+              </a:defRPr>
+            </a:lvl1pPr>
+          </a:lstStyle>
+          <a:p>
+            <a:pPr algn="l" latinLnBrk="0"/>
+            <a:r>
+              <a:rPr lang="ko-KR" altLang="en-US" sz="4400" b="1" dirty="0"/>
+              <a:t>게임 시스템</a:t>
+            </a:r>
+            <a:endParaRPr lang="en-US" altLang="ko-KR" sz="4400" b="1" dirty="0"/>
+          </a:p>
+        </p:txBody>
+      </p:sp>
+      <p:sp>
+        <p:nvSpPr>
+          <p:cNvPr id="10" name="TextBox 9">
+            <a:extLst>
+              <a:ext uri="{FF2B5EF4-FFF2-40B4-BE49-F238E27FC236}">
+                <a16:creationId xmlns:a16="http://schemas.microsoft.com/office/drawing/2014/main" id="{A9C4D6D0-3B0F-51FA-9525-8491A55916DE}"/>
+              </a:ext>
+            </a:extLst>
+          </p:cNvPr>
+          <p:cNvSpPr txBox="1"/>
+          <p:nvPr/>
+        </p:nvSpPr>
+        <p:spPr>
+          <a:xfrm>
+            <a:off x="848159" y="1735637"/>
+            <a:ext cx="8956241" cy="456087"/>
+          </a:xfrm>
+          <a:prstGeom prst="rect">
+            <a:avLst/>
+          </a:prstGeom>
+          <a:noFill/>
+        </p:spPr>
+        <p:txBody>
+          <a:bodyPr wrap="square" rtlCol="0">
+            <a:spAutoFit/>
+          </a:bodyPr>
+          <a:lstStyle/>
+          <a:p>
+            <a:pPr lvl="0" defTabSz="914400" eaLnBrk="0" fontAlgn="base" hangingPunct="0">
+              <a:lnSpc>
+                <a:spcPct val="150000"/>
+              </a:lnSpc>
+              <a:spcBef>
+                <a:spcPct val="0"/>
+              </a:spcBef>
+              <a:spcAft>
+                <a:spcPct val="0"/>
+              </a:spcAft>
+              <a:buFontTx/>
+              <a:buChar char="•"/>
+            </a:pPr>
+            <a:r>
+              <a:rPr lang="ko-KR" altLang="en-US" b="1" dirty="0">
+                <a:latin typeface="Arial" panose="020B0604020202020204" pitchFamily="34" charset="0"/>
+              </a:rPr>
+              <a:t> 원작의 골드 </a:t>
+            </a:r>
+            <a:r>
+              <a:rPr lang="en-US" altLang="ko-KR" b="1" dirty="0">
+                <a:latin typeface="Arial" panose="020B0604020202020204" pitchFamily="34" charset="0"/>
+              </a:rPr>
+              <a:t>= </a:t>
+            </a:r>
+            <a:r>
+              <a:rPr lang="ko-KR" altLang="en-US" b="1" dirty="0">
+                <a:latin typeface="Arial" panose="020B0604020202020204" pitchFamily="34" charset="0"/>
+              </a:rPr>
+              <a:t>스테이지 중간 상점에서 아이템을 구매하는 용도</a:t>
+            </a:r>
+            <a:r>
+              <a:rPr lang="en-US" altLang="ko-KR" b="1" dirty="0">
+                <a:latin typeface="Arial" panose="020B0604020202020204" pitchFamily="34" charset="0"/>
+              </a:rPr>
+              <a:t>.</a:t>
+            </a:r>
+            <a:endParaRPr lang="ko-KR" altLang="ko-KR" b="1" dirty="0">
+              <a:latin typeface="Arial" panose="020B0604020202020204" pitchFamily="34" charset="0"/>
+            </a:endParaRPr>
+          </a:p>
+        </p:txBody>
+      </p:sp>
+      <p:sp>
+        <p:nvSpPr>
+          <p:cNvPr id="12" name="화살표: 아래쪽 11">
+            <a:extLst>
+              <a:ext uri="{FF2B5EF4-FFF2-40B4-BE49-F238E27FC236}">
+                <a16:creationId xmlns:a16="http://schemas.microsoft.com/office/drawing/2014/main" id="{9702AE8D-9E85-84A9-834A-D62926F3802F}"/>
+              </a:ext>
+            </a:extLst>
+          </p:cNvPr>
+          <p:cNvSpPr/>
+          <p:nvPr/>
+        </p:nvSpPr>
+        <p:spPr>
+          <a:xfrm>
+            <a:off x="4862729" y="2347254"/>
+            <a:ext cx="463550" cy="369332"/>
+          </a:xfrm>
+          <a:prstGeom prst="downArrow">
+            <a:avLst/>
+          </a:prstGeom>
+        </p:spPr>
+        <p:style>
+          <a:lnRef idx="2">
+            <a:schemeClr val="accent1">
+              <a:shade val="15000"/>
+            </a:schemeClr>
+          </a:lnRef>
+          <a:fillRef idx="1">
+            <a:schemeClr val="accent1"/>
+          </a:fillRef>
+          <a:effectRef idx="0">
+            <a:schemeClr val="accent1"/>
+          </a:effectRef>
+          <a:fontRef idx="minor">
+            <a:schemeClr val="lt1"/>
+          </a:fontRef>
+        </p:style>
+        <p:txBody>
+          <a:bodyPr rtlCol="0" anchor="ctr"/>
+          <a:lstStyle/>
+          <a:p>
+            <a:pPr algn="ctr"/>
+            <a:endParaRPr lang="ko-KR" altLang="en-US"/>
+          </a:p>
+        </p:txBody>
+      </p:sp>
+      <p:sp>
+        <p:nvSpPr>
+          <p:cNvPr id="13" name="TextBox 12">
+            <a:extLst>
+              <a:ext uri="{FF2B5EF4-FFF2-40B4-BE49-F238E27FC236}">
+                <a16:creationId xmlns:a16="http://schemas.microsoft.com/office/drawing/2014/main" id="{CAE04372-AB18-B689-4ACF-53704AB5E93C}"/>
+              </a:ext>
+            </a:extLst>
+          </p:cNvPr>
+          <p:cNvSpPr txBox="1"/>
+          <p:nvPr/>
+        </p:nvSpPr>
+        <p:spPr>
+          <a:xfrm>
+            <a:off x="848159" y="2872117"/>
+            <a:ext cx="8956241" cy="872034"/>
+          </a:xfrm>
+          <a:prstGeom prst="rect">
+            <a:avLst/>
+          </a:prstGeom>
+          <a:noFill/>
+        </p:spPr>
+        <p:txBody>
+          <a:bodyPr wrap="square" rtlCol="0">
+            <a:spAutoFit/>
+          </a:bodyPr>
+          <a:lstStyle/>
+          <a:p>
+            <a:pPr lvl="0" defTabSz="914400" eaLnBrk="0" fontAlgn="base" hangingPunct="0">
+              <a:lnSpc>
+                <a:spcPct val="150000"/>
+              </a:lnSpc>
+              <a:spcBef>
+                <a:spcPct val="0"/>
+              </a:spcBef>
+              <a:spcAft>
+                <a:spcPct val="0"/>
+              </a:spcAft>
+              <a:buFontTx/>
+              <a:buChar char="•"/>
+            </a:pPr>
+            <a:r>
+              <a:rPr lang="ko-KR" altLang="en-US" b="1" dirty="0">
+                <a:latin typeface="Arial" panose="020B0604020202020204" pitchFamily="34" charset="0"/>
+              </a:rPr>
+              <a:t> 모작의 골드 </a:t>
+            </a:r>
+            <a:r>
+              <a:rPr lang="en-US" altLang="ko-KR" b="1" dirty="0">
+                <a:latin typeface="Arial" panose="020B0604020202020204" pitchFamily="34" charset="0"/>
+              </a:rPr>
+              <a:t>=</a:t>
+            </a:r>
+            <a:r>
+              <a:rPr lang="ko-KR" altLang="en-US" b="1" dirty="0">
+                <a:latin typeface="Arial" panose="020B0604020202020204" pitchFamily="34" charset="0"/>
+              </a:rPr>
+              <a:t> 게임 시작 전 스킬을 해금하는 용도</a:t>
+            </a:r>
+            <a:r>
+              <a:rPr lang="en-US" altLang="ko-KR" b="1" dirty="0">
+                <a:latin typeface="Arial" panose="020B0604020202020204" pitchFamily="34" charset="0"/>
+              </a:rPr>
+              <a:t>.</a:t>
+            </a:r>
+          </a:p>
+          <a:p>
+            <a:pPr lvl="0" defTabSz="914400" eaLnBrk="0" fontAlgn="base" hangingPunct="0">
+              <a:lnSpc>
+                <a:spcPct val="150000"/>
+              </a:lnSpc>
+              <a:spcBef>
+                <a:spcPct val="0"/>
+              </a:spcBef>
+              <a:spcAft>
+                <a:spcPct val="0"/>
+              </a:spcAft>
+            </a:pPr>
+            <a:r>
+              <a:rPr lang="ko-KR" altLang="en-US" b="1" dirty="0"/>
+              <a:t>   골드 ≒ </a:t>
+            </a:r>
+            <a:r>
+              <a:rPr lang="en-US" altLang="ko-KR" b="1" dirty="0"/>
+              <a:t>RPG</a:t>
+            </a:r>
+            <a:r>
+              <a:rPr lang="ko-KR" altLang="en-US" b="1" dirty="0"/>
+              <a:t>의 </a:t>
+            </a:r>
+            <a:r>
+              <a:rPr lang="en-US" altLang="ko-KR" b="1" dirty="0"/>
+              <a:t>‘</a:t>
+            </a:r>
+            <a:r>
+              <a:rPr lang="ko-KR" altLang="en-US" b="1" dirty="0"/>
+              <a:t>경험치</a:t>
+            </a:r>
+            <a:r>
+              <a:rPr lang="en-US" altLang="ko-KR" b="1" dirty="0"/>
+              <a:t>’</a:t>
+            </a:r>
+            <a:endParaRPr lang="ko-KR" altLang="ko-KR" b="1" dirty="0">
+              <a:latin typeface="Arial" panose="020B0604020202020204" pitchFamily="34" charset="0"/>
+            </a:endParaRPr>
+          </a:p>
+        </p:txBody>
+      </p:sp>
+      <p:sp>
+        <p:nvSpPr>
+          <p:cNvPr id="15" name="TextBox 14">
+            <a:extLst>
+              <a:ext uri="{FF2B5EF4-FFF2-40B4-BE49-F238E27FC236}">
+                <a16:creationId xmlns:a16="http://schemas.microsoft.com/office/drawing/2014/main" id="{70D9BD45-A9C8-49E5-7C08-6FF67E3DF601}"/>
+              </a:ext>
+            </a:extLst>
+          </p:cNvPr>
+          <p:cNvSpPr txBox="1"/>
+          <p:nvPr/>
+        </p:nvSpPr>
+        <p:spPr>
+          <a:xfrm>
+            <a:off x="848158" y="4059567"/>
+            <a:ext cx="8956241" cy="462627"/>
+          </a:xfrm>
+          <a:prstGeom prst="rect">
+            <a:avLst/>
+          </a:prstGeom>
+          <a:noFill/>
+        </p:spPr>
+        <p:txBody>
+          <a:bodyPr wrap="square" rtlCol="0">
+            <a:spAutoFit/>
+          </a:bodyPr>
+          <a:lstStyle/>
+          <a:p>
+            <a:pPr lvl="0" defTabSz="914400" eaLnBrk="0" fontAlgn="base" hangingPunct="0">
+              <a:lnSpc>
+                <a:spcPct val="150000"/>
+              </a:lnSpc>
+              <a:spcBef>
+                <a:spcPct val="0"/>
+              </a:spcBef>
+              <a:spcAft>
+                <a:spcPct val="0"/>
+              </a:spcAft>
+              <a:buFontTx/>
+              <a:buChar char="•"/>
+            </a:pPr>
+            <a:r>
+              <a:rPr lang="en-US" altLang="ko-KR" dirty="0">
+                <a:latin typeface="Arial" panose="020B0604020202020204" pitchFamily="34" charset="0"/>
+              </a:rPr>
+              <a:t> </a:t>
+            </a:r>
+            <a:r>
+              <a:rPr lang="ko-KR" altLang="en-US" b="1" dirty="0">
+                <a:latin typeface="Arial" panose="020B0604020202020204" pitchFamily="34" charset="0"/>
+              </a:rPr>
+              <a:t>원작의 스킬 </a:t>
+            </a:r>
+            <a:r>
+              <a:rPr lang="en-US" altLang="ko-KR" b="1" dirty="0">
+                <a:latin typeface="Arial" panose="020B0604020202020204" pitchFamily="34" charset="0"/>
+              </a:rPr>
+              <a:t>– </a:t>
+            </a:r>
+            <a:r>
+              <a:rPr lang="ko-KR" altLang="en-US" b="1" dirty="0" err="1">
+                <a:latin typeface="Arial" panose="020B0604020202020204" pitchFamily="34" charset="0"/>
+              </a:rPr>
+              <a:t>스컬마다</a:t>
+            </a:r>
+            <a:r>
+              <a:rPr lang="ko-KR" altLang="en-US" b="1" dirty="0">
+                <a:latin typeface="Arial" panose="020B0604020202020204" pitchFamily="34" charset="0"/>
+              </a:rPr>
+              <a:t> 고유의 스킬 보유</a:t>
+            </a:r>
+            <a:r>
+              <a:rPr lang="en-US" altLang="ko-KR" b="1" dirty="0">
+                <a:latin typeface="Arial" panose="020B0604020202020204" pitchFamily="34" charset="0"/>
+              </a:rPr>
+              <a:t>. </a:t>
+            </a:r>
+            <a:r>
+              <a:rPr lang="ko-KR" altLang="en-US" b="1" dirty="0">
+                <a:latin typeface="Arial" panose="020B0604020202020204" pitchFamily="34" charset="0"/>
+              </a:rPr>
+              <a:t>즉</a:t>
+            </a:r>
+            <a:r>
+              <a:rPr lang="en-US" altLang="ko-KR" b="1" dirty="0">
+                <a:latin typeface="Arial" panose="020B0604020202020204" pitchFamily="34" charset="0"/>
+              </a:rPr>
+              <a:t>, </a:t>
+            </a:r>
+            <a:r>
+              <a:rPr lang="ko-KR" altLang="en-US" b="1" dirty="0">
+                <a:latin typeface="Arial" panose="020B0604020202020204" pitchFamily="34" charset="0"/>
+              </a:rPr>
+              <a:t>처음부터 스킬 사용 가능</a:t>
+            </a:r>
+            <a:r>
+              <a:rPr lang="en-US" altLang="ko-KR" b="1" dirty="0">
+                <a:latin typeface="Arial" panose="020B0604020202020204" pitchFamily="34" charset="0"/>
+              </a:rPr>
+              <a:t>.</a:t>
+            </a:r>
+            <a:endParaRPr lang="ko-KR" altLang="ko-KR" b="1" dirty="0">
+              <a:latin typeface="Arial" panose="020B0604020202020204" pitchFamily="34" charset="0"/>
+            </a:endParaRPr>
+          </a:p>
+        </p:txBody>
+      </p:sp>
+      <p:sp>
+        <p:nvSpPr>
+          <p:cNvPr id="16" name="화살표: 아래쪽 15">
+            <a:extLst>
+              <a:ext uri="{FF2B5EF4-FFF2-40B4-BE49-F238E27FC236}">
+                <a16:creationId xmlns:a16="http://schemas.microsoft.com/office/drawing/2014/main" id="{0D0DA8BB-CE42-3715-D850-EA5361284C55}"/>
+              </a:ext>
+            </a:extLst>
+          </p:cNvPr>
+          <p:cNvSpPr/>
+          <p:nvPr/>
+        </p:nvSpPr>
+        <p:spPr>
+          <a:xfrm>
+            <a:off x="4862729" y="4676320"/>
+            <a:ext cx="463550" cy="369332"/>
+          </a:xfrm>
+          <a:prstGeom prst="downArrow">
+            <a:avLst/>
+          </a:prstGeom>
+        </p:spPr>
+        <p:style>
+          <a:lnRef idx="2">
+            <a:schemeClr val="accent1">
+              <a:shade val="15000"/>
+            </a:schemeClr>
+          </a:lnRef>
+          <a:fillRef idx="1">
+            <a:schemeClr val="accent1"/>
+          </a:fillRef>
+          <a:effectRef idx="0">
+            <a:schemeClr val="accent1"/>
+          </a:effectRef>
+          <a:fontRef idx="minor">
+            <a:schemeClr val="lt1"/>
+          </a:fontRef>
+        </p:style>
+        <p:txBody>
+          <a:bodyPr rtlCol="0" anchor="ctr"/>
+          <a:lstStyle/>
+          <a:p>
+            <a:pPr algn="ctr"/>
+            <a:endParaRPr lang="ko-KR" altLang="en-US"/>
+          </a:p>
+        </p:txBody>
+      </p:sp>
+      <p:sp>
+        <p:nvSpPr>
+          <p:cNvPr id="17" name="TextBox 16">
+            <a:extLst>
+              <a:ext uri="{FF2B5EF4-FFF2-40B4-BE49-F238E27FC236}">
+                <a16:creationId xmlns:a16="http://schemas.microsoft.com/office/drawing/2014/main" id="{A08BBA89-4424-A3C8-F8D0-F0E1CCA733CF}"/>
+              </a:ext>
+            </a:extLst>
+          </p:cNvPr>
+          <p:cNvSpPr txBox="1"/>
+          <p:nvPr/>
+        </p:nvSpPr>
+        <p:spPr>
+          <a:xfrm>
+            <a:off x="848157" y="5199778"/>
+            <a:ext cx="8956241" cy="462627"/>
+          </a:xfrm>
+          <a:prstGeom prst="rect">
+            <a:avLst/>
+          </a:prstGeom>
+          <a:noFill/>
+        </p:spPr>
+        <p:txBody>
+          <a:bodyPr wrap="square" rtlCol="0">
+            <a:spAutoFit/>
+          </a:bodyPr>
+          <a:lstStyle/>
+          <a:p>
+            <a:pPr lvl="0" defTabSz="914400" eaLnBrk="0" fontAlgn="base" hangingPunct="0">
+              <a:lnSpc>
+                <a:spcPct val="150000"/>
+              </a:lnSpc>
+              <a:spcBef>
+                <a:spcPct val="0"/>
+              </a:spcBef>
+              <a:spcAft>
+                <a:spcPct val="0"/>
+              </a:spcAft>
+              <a:buFontTx/>
+              <a:buChar char="•"/>
+            </a:pPr>
+            <a:r>
+              <a:rPr lang="en-US" altLang="ko-KR" dirty="0">
+                <a:latin typeface="Arial" panose="020B0604020202020204" pitchFamily="34" charset="0"/>
+              </a:rPr>
+              <a:t> </a:t>
+            </a:r>
+            <a:r>
+              <a:rPr lang="ko-KR" altLang="en-US" b="1" dirty="0">
+                <a:latin typeface="Arial" panose="020B0604020202020204" pitchFamily="34" charset="0"/>
+              </a:rPr>
+              <a:t>모작의 스킬 </a:t>
+            </a:r>
+            <a:r>
+              <a:rPr lang="en-US" altLang="ko-KR" b="1" dirty="0">
+                <a:latin typeface="Arial" panose="020B0604020202020204" pitchFamily="34" charset="0"/>
+              </a:rPr>
+              <a:t>– RPG </a:t>
+            </a:r>
+            <a:r>
+              <a:rPr lang="ko-KR" altLang="en-US" b="1" dirty="0">
+                <a:latin typeface="Arial" panose="020B0604020202020204" pitchFamily="34" charset="0"/>
+              </a:rPr>
+              <a:t>요소를 가미해 스킬 없이 시작</a:t>
+            </a:r>
+            <a:r>
+              <a:rPr lang="en-US" altLang="ko-KR" b="1" dirty="0">
+                <a:latin typeface="Arial" panose="020B0604020202020204" pitchFamily="34" charset="0"/>
+              </a:rPr>
+              <a:t>. </a:t>
+            </a:r>
+            <a:r>
+              <a:rPr lang="ko-KR" altLang="en-US" b="1" dirty="0">
+                <a:latin typeface="Arial" panose="020B0604020202020204" pitchFamily="34" charset="0"/>
+              </a:rPr>
+              <a:t>게임 진행하며 해금</a:t>
+            </a:r>
+            <a:r>
+              <a:rPr lang="en-US" altLang="ko-KR" b="1" dirty="0">
+                <a:latin typeface="Arial" panose="020B0604020202020204" pitchFamily="34" charset="0"/>
+              </a:rPr>
+              <a:t>.</a:t>
+            </a:r>
+            <a:endParaRPr lang="ko-KR" altLang="ko-KR" b="1" dirty="0">
+              <a:latin typeface="Arial" panose="020B0604020202020204" pitchFamily="34" charset="0"/>
+            </a:endParaRPr>
+          </a:p>
+        </p:txBody>
+      </p:sp>
+    </p:spTree>
+    <p:extLst>
+      <p:ext uri="{BB962C8B-B14F-4D97-AF65-F5344CB8AC3E}">
+        <p14:creationId xmlns:p14="http://schemas.microsoft.com/office/powerpoint/2010/main" val="3266318893"/>
       </p:ext>
     </p:extLst>
   </p:cSld>
